--- a/temp/AnantaSutra-Pitch-Deck.pptx
+++ b/temp/AnantaSutra-Pitch-Deck.pptx
@@ -316,7 +316,7 @@
           <a:p>
             <a:fld id="{5BCAD085-E8A6-8845-BD4E-CB4CCA059FC4}" type="datetimeFigureOut">
               <a:rPr lang="en-US" smtClean="0"/>
-              <a:t>6/18/2026</a:t>
+              <a:t>7/3/2026</a:t>
             </a:fld>
             <a:endParaRPr lang="en-US"/>
           </a:p>
@@ -486,7 +486,7 @@
           <a:p>
             <a:fld id="{5BCAD085-E8A6-8845-BD4E-CB4CCA059FC4}" type="datetimeFigureOut">
               <a:rPr lang="en-US" smtClean="0"/>
-              <a:t>6/18/2026</a:t>
+              <a:t>7/3/2026</a:t>
             </a:fld>
             <a:endParaRPr lang="en-US"/>
           </a:p>
@@ -666,7 +666,7 @@
           <a:p>
             <a:fld id="{5BCAD085-E8A6-8845-BD4E-CB4CCA059FC4}" type="datetimeFigureOut">
               <a:rPr lang="en-US" smtClean="0"/>
-              <a:t>6/18/2026</a:t>
+              <a:t>7/3/2026</a:t>
             </a:fld>
             <a:endParaRPr lang="en-US"/>
           </a:p>
@@ -836,7 +836,7 @@
           <a:p>
             <a:fld id="{5BCAD085-E8A6-8845-BD4E-CB4CCA059FC4}" type="datetimeFigureOut">
               <a:rPr lang="en-US" smtClean="0"/>
-              <a:t>6/18/2026</a:t>
+              <a:t>7/3/2026</a:t>
             </a:fld>
             <a:endParaRPr lang="en-US"/>
           </a:p>
@@ -1082,7 +1082,7 @@
           <a:p>
             <a:fld id="{5BCAD085-E8A6-8845-BD4E-CB4CCA059FC4}" type="datetimeFigureOut">
               <a:rPr lang="en-US" smtClean="0"/>
-              <a:t>6/18/2026</a:t>
+              <a:t>7/3/2026</a:t>
             </a:fld>
             <a:endParaRPr lang="en-US"/>
           </a:p>
@@ -1370,7 +1370,7 @@
           <a:p>
             <a:fld id="{5BCAD085-E8A6-8845-BD4E-CB4CCA059FC4}" type="datetimeFigureOut">
               <a:rPr lang="en-US" smtClean="0"/>
-              <a:t>6/18/2026</a:t>
+              <a:t>7/3/2026</a:t>
             </a:fld>
             <a:endParaRPr lang="en-US"/>
           </a:p>
@@ -1792,7 +1792,7 @@
           <a:p>
             <a:fld id="{5BCAD085-E8A6-8845-BD4E-CB4CCA059FC4}" type="datetimeFigureOut">
               <a:rPr lang="en-US" smtClean="0"/>
-              <a:t>6/18/2026</a:t>
+              <a:t>7/3/2026</a:t>
             </a:fld>
             <a:endParaRPr lang="en-US"/>
           </a:p>
@@ -1910,7 +1910,7 @@
           <a:p>
             <a:fld id="{5BCAD085-E8A6-8845-BD4E-CB4CCA059FC4}" type="datetimeFigureOut">
               <a:rPr lang="en-US" smtClean="0"/>
-              <a:t>6/18/2026</a:t>
+              <a:t>7/3/2026</a:t>
             </a:fld>
             <a:endParaRPr lang="en-US"/>
           </a:p>
@@ -2005,7 +2005,7 @@
           <a:p>
             <a:fld id="{5BCAD085-E8A6-8845-BD4E-CB4CCA059FC4}" type="datetimeFigureOut">
               <a:rPr lang="en-US" smtClean="0"/>
-              <a:t>6/18/2026</a:t>
+              <a:t>7/3/2026</a:t>
             </a:fld>
             <a:endParaRPr lang="en-US"/>
           </a:p>
@@ -2282,7 +2282,7 @@
           <a:p>
             <a:fld id="{5BCAD085-E8A6-8845-BD4E-CB4CCA059FC4}" type="datetimeFigureOut">
               <a:rPr lang="en-US" smtClean="0"/>
-              <a:t>6/18/2026</a:t>
+              <a:t>7/3/2026</a:t>
             </a:fld>
             <a:endParaRPr lang="en-US"/>
           </a:p>
@@ -2535,7 +2535,7 @@
           <a:p>
             <a:fld id="{5BCAD085-E8A6-8845-BD4E-CB4CCA059FC4}" type="datetimeFigureOut">
               <a:rPr lang="en-US" smtClean="0"/>
-              <a:t>6/18/2026</a:t>
+              <a:t>7/3/2026</a:t>
             </a:fld>
             <a:endParaRPr lang="en-US"/>
           </a:p>
@@ -2748,7 +2748,7 @@
           <a:p>
             <a:fld id="{5BCAD085-E8A6-8845-BD4E-CB4CCA059FC4}" type="datetimeFigureOut">
               <a:rPr lang="en-US" smtClean="0"/>
-              <a:t>6/18/2026</a:t>
+              <a:t>7/3/2026</a:t>
             </a:fld>
             <a:endParaRPr lang="en-US"/>
           </a:p>
@@ -3131,7 +3131,7 @@
         </p:nvSpPr>
         <p:spPr>
           <a:xfrm>
-            <a:off x="0" y="-8709"/>
+            <a:off x="305" y="0"/>
             <a:ext cx="12191695" cy="6858000"/>
           </a:xfrm>
           <a:prstGeom prst="rect">
@@ -3170,194 +3170,14 @@
       </p:sp>
       <p:sp>
         <p:nvSpPr>
-          <p:cNvPr id="3" name="Oval 2"/>
-          <p:cNvSpPr/>
-          <p:nvPr/>
-        </p:nvSpPr>
-        <p:spPr>
-          <a:xfrm>
-            <a:off x="6858000" y="1143000"/>
-            <a:ext cx="4572000" cy="4572000"/>
-          </a:xfrm>
-          <a:prstGeom prst="ellipse">
-            <a:avLst/>
-          </a:prstGeom>
-          <a:noFill/>
-          <a:ln w="13970">
-            <a:solidFill>
-              <a:srgbClr val="E8A317"/>
-            </a:solidFill>
-          </a:ln>
-          <a:effectLst/>
-        </p:spPr>
-        <p:style>
-          <a:lnRef idx="1">
-            <a:schemeClr val="accent1"/>
-          </a:lnRef>
-          <a:fillRef idx="3">
-            <a:schemeClr val="accent1"/>
-          </a:fillRef>
-          <a:effectRef idx="2">
-            <a:schemeClr val="accent1"/>
-          </a:effectRef>
-          <a:fontRef idx="minor">
-            <a:schemeClr val="lt1"/>
-          </a:fontRef>
-        </p:style>
-        <p:txBody>
-          <a:bodyPr rtlCol="0" anchor="ctr"/>
-          <a:lstStyle/>
-          <a:p>
-            <a:pPr algn="ctr"/>
-            <a:endParaRPr/>
-          </a:p>
-        </p:txBody>
-      </p:sp>
-      <p:sp>
-        <p:nvSpPr>
-          <p:cNvPr id="4" name="Oval 3"/>
-          <p:cNvSpPr/>
-          <p:nvPr/>
-        </p:nvSpPr>
-        <p:spPr>
-          <a:xfrm>
-            <a:off x="7360920" y="1645920"/>
-            <a:ext cx="3566160" cy="3566160"/>
-          </a:xfrm>
-          <a:prstGeom prst="ellipse">
-            <a:avLst/>
-          </a:prstGeom>
-          <a:noFill/>
-          <a:ln w="13970">
-            <a:solidFill>
-              <a:srgbClr val="6A3DE8"/>
-            </a:solidFill>
-          </a:ln>
-          <a:effectLst/>
-        </p:spPr>
-        <p:style>
-          <a:lnRef idx="1">
-            <a:schemeClr val="accent1"/>
-          </a:lnRef>
-          <a:fillRef idx="3">
-            <a:schemeClr val="accent1"/>
-          </a:fillRef>
-          <a:effectRef idx="2">
-            <a:schemeClr val="accent1"/>
-          </a:effectRef>
-          <a:fontRef idx="minor">
-            <a:schemeClr val="lt1"/>
-          </a:fontRef>
-        </p:style>
-        <p:txBody>
-          <a:bodyPr rtlCol="0" anchor="ctr"/>
-          <a:lstStyle/>
-          <a:p>
-            <a:pPr algn="ctr"/>
-            <a:endParaRPr/>
-          </a:p>
-        </p:txBody>
-      </p:sp>
-      <p:sp>
-        <p:nvSpPr>
-          <p:cNvPr id="5" name="Oval 4"/>
-          <p:cNvSpPr/>
-          <p:nvPr/>
-        </p:nvSpPr>
-        <p:spPr>
-          <a:xfrm>
-            <a:off x="7863840" y="2148840"/>
-            <a:ext cx="2560320" cy="2560320"/>
-          </a:xfrm>
-          <a:prstGeom prst="ellipse">
-            <a:avLst/>
-          </a:prstGeom>
-          <a:noFill/>
-          <a:ln w="13970">
-            <a:solidFill>
-              <a:srgbClr val="E8A317"/>
-            </a:solidFill>
-          </a:ln>
-          <a:effectLst/>
-        </p:spPr>
-        <p:style>
-          <a:lnRef idx="1">
-            <a:schemeClr val="accent1"/>
-          </a:lnRef>
-          <a:fillRef idx="3">
-            <a:schemeClr val="accent1"/>
-          </a:fillRef>
-          <a:effectRef idx="2">
-            <a:schemeClr val="accent1"/>
-          </a:effectRef>
-          <a:fontRef idx="minor">
-            <a:schemeClr val="lt1"/>
-          </a:fontRef>
-        </p:style>
-        <p:txBody>
-          <a:bodyPr rtlCol="0" anchor="ctr"/>
-          <a:lstStyle/>
-          <a:p>
-            <a:pPr algn="ctr"/>
-            <a:endParaRPr/>
-          </a:p>
-        </p:txBody>
-      </p:sp>
-      <p:sp>
-        <p:nvSpPr>
-          <p:cNvPr id="6" name="Oval 5"/>
-          <p:cNvSpPr/>
-          <p:nvPr/>
-        </p:nvSpPr>
-        <p:spPr>
-          <a:xfrm>
-            <a:off x="8366760" y="2651760"/>
-            <a:ext cx="1554480" cy="1554480"/>
-          </a:xfrm>
-          <a:prstGeom prst="ellipse">
-            <a:avLst/>
-          </a:prstGeom>
-          <a:noFill/>
-          <a:ln w="13970">
-            <a:solidFill>
-              <a:srgbClr val="6A3DE8"/>
-            </a:solidFill>
-          </a:ln>
-          <a:effectLst/>
-        </p:spPr>
-        <p:style>
-          <a:lnRef idx="1">
-            <a:schemeClr val="accent1"/>
-          </a:lnRef>
-          <a:fillRef idx="3">
-            <a:schemeClr val="accent1"/>
-          </a:fillRef>
-          <a:effectRef idx="2">
-            <a:schemeClr val="accent1"/>
-          </a:effectRef>
-          <a:fontRef idx="minor">
-            <a:schemeClr val="lt1"/>
-          </a:fontRef>
-        </p:style>
-        <p:txBody>
-          <a:bodyPr rtlCol="0" anchor="ctr"/>
-          <a:lstStyle/>
-          <a:p>
-            <a:pPr algn="ctr"/>
-            <a:endParaRPr/>
-          </a:p>
-        </p:txBody>
-      </p:sp>
-      <p:sp>
-        <p:nvSpPr>
-          <p:cNvPr id="7" name="TextBox 6"/>
+          <p:cNvPr id="8" name="TextBox 7"/>
           <p:cNvSpPr txBox="1"/>
           <p:nvPr/>
         </p:nvSpPr>
         <p:spPr>
-          <a:xfrm rot="20735612">
-            <a:off x="7964705" y="3025936"/>
-            <a:ext cx="2377440" cy="1371600"/>
+          <a:xfrm>
+            <a:off x="822960" y="1600200"/>
+            <a:ext cx="6858000" cy="365760"/>
           </a:xfrm>
           <a:prstGeom prst="rect">
             <a:avLst/>
@@ -3370,7 +3190,7 @@
           </a:bodyPr>
           <a:lstStyle/>
           <a:p>
-            <a:pPr algn="ctr">
+            <a:pPr algn="l">
               <a:spcBef>
                 <a:spcPts val="0"/>
               </a:spcBef>
@@ -3379,55 +3199,22 @@
               </a:spcAft>
             </a:pPr>
             <a:r>
-              <a:rPr sz="5400" b="1" i="0" dirty="0">
-                <a:solidFill>
-                  <a:srgbClr val="3A2E12"/>
-                </a:solidFill>
-                <a:latin typeface="Segoe UI"/>
-              </a:rPr>
-              <a:t>ॐ</a:t>
-            </a:r>
-          </a:p>
-        </p:txBody>
-      </p:sp>
-      <p:sp>
-        <p:nvSpPr>
-          <p:cNvPr id="8" name="TextBox 7"/>
-          <p:cNvSpPr txBox="1"/>
-          <p:nvPr/>
-        </p:nvSpPr>
-        <p:spPr>
-          <a:xfrm>
-            <a:off x="822960" y="1600200"/>
-            <a:ext cx="6858000" cy="365760"/>
-          </a:xfrm>
-          <a:prstGeom prst="rect">
-            <a:avLst/>
-          </a:prstGeom>
-          <a:noFill/>
-        </p:spPr>
-        <p:txBody>
-          <a:bodyPr wrap="square">
-            <a:spAutoFit/>
-          </a:bodyPr>
-          <a:lstStyle/>
-          <a:p>
-            <a:pPr algn="l">
-              <a:spcBef>
-                <a:spcPts val="0"/>
-              </a:spcBef>
-              <a:spcAft>
-                <a:spcPts val="400"/>
-              </a:spcAft>
-            </a:pPr>
-            <a:r>
-              <a:rPr sz="1400" b="1" i="0">
+              <a:rPr sz="1400" b="1" i="0" dirty="0" err="1">
                 <a:solidFill>
                   <a:srgbClr val="E8A317"/>
                 </a:solidFill>
                 <a:latin typeface="Segoe UI"/>
               </a:rPr>
-              <a:t>अनन्तसूत्र   ·   ANANTASUTRA</a:t>
+              <a:t>अनन्तसूत्र</a:t>
+            </a:r>
+            <a:r>
+              <a:rPr sz="1400" b="1" i="0" dirty="0">
+                <a:solidFill>
+                  <a:srgbClr val="E8A317"/>
+                </a:solidFill>
+                <a:latin typeface="Segoe UI"/>
+              </a:rPr>
+              <a:t>   ·   ANANTASUTRA</a:t>
             </a:r>
           </a:p>
         </p:txBody>
@@ -3592,7 +3379,7 @@
               </a:spcAft>
             </a:pPr>
             <a:r>
-              <a:rPr sz="1450" b="0" i="0">
+              <a:rPr sz="1450" b="0" i="0" dirty="0">
                 <a:solidFill>
                   <a:srgbClr val="C9CAD3"/>
                 </a:solidFill>
@@ -3687,6 +3474,36 @@
           </a:p>
         </p:txBody>
       </p:sp>
+      <p:pic>
+        <p:nvPicPr>
+          <p:cNvPr id="15" name="図 14"/>
+          <p:cNvPicPr>
+            <a:picLocks noChangeAspect="1"/>
+          </p:cNvPicPr>
+          <p:nvPr/>
+        </p:nvPicPr>
+        <p:blipFill>
+          <a:blip r:embed="rId2">
+            <a:extLst>
+              <a:ext uri="{28A0092B-C50C-407E-A947-70E740481C1C}">
+                <a14:useLocalDpi xmlns:a14="http://schemas.microsoft.com/office/drawing/2010/main" val="0"/>
+              </a:ext>
+            </a:extLst>
+          </a:blip>
+          <a:stretch>
+            <a:fillRect/>
+          </a:stretch>
+        </p:blipFill>
+        <p:spPr>
+          <a:xfrm>
+            <a:off x="7576457" y="1661356"/>
+            <a:ext cx="4222808" cy="4222808"/>
+          </a:xfrm>
+          <a:prstGeom prst="rect">
+            <a:avLst/>
+          </a:prstGeom>
+        </p:spPr>
+      </p:pic>
     </p:spTree>
   </p:cSld>
   <p:clrMapOvr>
@@ -4143,7 +3960,7 @@
               </a:spcAft>
             </a:pPr>
             <a:r>
-              <a:rPr sz="2500" b="1" i="0">
+              <a:rPr sz="2500" b="1" i="0" dirty="0">
                 <a:solidFill>
                   <a:srgbClr val="E8A317"/>
                 </a:solidFill>
@@ -4162,7 +3979,7 @@
               </a:spcAft>
             </a:pPr>
             <a:r>
-              <a:rPr sz="1300" b="1" i="0">
+              <a:rPr sz="1300" b="1" i="0" dirty="0">
                 <a:solidFill>
                   <a:srgbClr val="FFFFFF"/>
                 </a:solidFill>
@@ -4181,7 +3998,7 @@
               </a:spcAft>
             </a:pPr>
             <a:r>
-              <a:rPr sz="1050" b="0" i="0">
+              <a:rPr sz="1050" b="0" i="0" dirty="0">
                 <a:solidFill>
                   <a:srgbClr val="C9CAD3"/>
                 </a:solidFill>
@@ -7242,7 +7059,7 @@
               </a:spcAft>
             </a:pPr>
             <a:r>
-              <a:rPr sz="2600" b="1" i="0">
+              <a:rPr sz="2600" b="1" i="0" dirty="0">
                 <a:solidFill>
                   <a:srgbClr val="FFFFFF"/>
                 </a:solidFill>
@@ -7261,14 +7078,29 @@
               </a:spcAft>
             </a:pPr>
             <a:r>
-              <a:rPr sz="1400" b="1" i="0">
+              <a:rPr sz="1400" b="1" i="0" dirty="0">
                 <a:solidFill>
                   <a:srgbClr val="E8A317"/>
                 </a:solidFill>
                 <a:latin typeface="Segoe UI"/>
               </a:rPr>
-              <a:t>Co-founder, AnantaSutra</a:t>
-            </a:r>
+              <a:t>Co-founder, </a:t>
+            </a:r>
+            <a:r>
+              <a:rPr sz="1400" b="1" i="0" dirty="0" err="1">
+                <a:solidFill>
+                  <a:srgbClr val="E8A317"/>
+                </a:solidFill>
+                <a:latin typeface="Segoe UI"/>
+              </a:rPr>
+              <a:t>AnantaSutra</a:t>
+            </a:r>
+            <a:endParaRPr sz="1400" b="1" i="0" dirty="0">
+              <a:solidFill>
+                <a:srgbClr val="E8A317"/>
+              </a:solidFill>
+              <a:latin typeface="Segoe UI"/>
+            </a:endParaRPr>
           </a:p>
           <a:p>
             <a:pPr algn="l">
@@ -7280,26 +7112,44 @@
               </a:spcAft>
             </a:pPr>
             <a:r>
-              <a:rPr sz="1400" b="0" i="0">
+              <a:rPr sz="1400" b="0" i="0" dirty="0">
                 <a:solidFill>
                   <a:srgbClr val="C9CAD3"/>
                 </a:solidFill>
                 <a:latin typeface="Segoe UI"/>
               </a:rPr>
-              <a:t>A software engineer and entrepreneur (.NET, React, AWS, Azure) bridging Delhi and Osaka, Japan. Bhavya leads a vetted network of professionals across 12+ domains — every expert backed by AnantaSutra's processes, tools and hands-on leadership.</a:t>
-            </a:r>
-          </a:p>
-          <a:p>
-            <a:pPr algn="l">
-              <a:spcBef>
-                <a:spcPts val="0"/>
-              </a:spcBef>
-              <a:spcAft>
-                <a:spcPts val="0"/>
-              </a:spcAft>
-            </a:pPr>
-            <a:r>
-              <a:rPr sz="1300" b="0" i="1">
+              <a:t>A software engineer and entrepreneur (.NET, React, AWS, Azure) bridging Delhi and Osaka, Japan. Bhavya leads a vetted network of professionals across 12+ domains — every expert backed by </a:t>
+            </a:r>
+            <a:r>
+              <a:rPr sz="1400" b="0" i="0" dirty="0" err="1">
+                <a:solidFill>
+                  <a:srgbClr val="C9CAD3"/>
+                </a:solidFill>
+                <a:latin typeface="Segoe UI"/>
+              </a:rPr>
+              <a:t>AnantaSutra's</a:t>
+            </a:r>
+            <a:r>
+              <a:rPr sz="1400" b="0" i="0" dirty="0">
+                <a:solidFill>
+                  <a:srgbClr val="C9CAD3"/>
+                </a:solidFill>
+                <a:latin typeface="Segoe UI"/>
+              </a:rPr>
+              <a:t> processes, tools and hands-on leadership.</a:t>
+            </a:r>
+          </a:p>
+          <a:p>
+            <a:pPr algn="l">
+              <a:spcBef>
+                <a:spcPts val="0"/>
+              </a:spcBef>
+              <a:spcAft>
+                <a:spcPts val="0"/>
+              </a:spcAft>
+            </a:pPr>
+            <a:r>
+              <a:rPr sz="1300" b="0" i="1" dirty="0">
                 <a:solidFill>
                   <a:srgbClr val="F0C040"/>
                 </a:solidFill>
@@ -10182,7 +10032,7 @@
         <p:spPr>
           <a:xfrm>
             <a:off x="822959" y="2212848"/>
-            <a:ext cx="2219706" cy="822960"/>
+            <a:ext cx="2219706" cy="469359"/>
           </a:xfrm>
           <a:prstGeom prst="rect">
             <a:avLst/>
@@ -10229,8 +10079,23 @@
                 </a:solidFill>
                 <a:latin typeface="Segoe UI"/>
               </a:rPr>
-              <a:t>Full-Stack · Backend · DevOps · Mobile</a:t>
-            </a:r>
+              <a:t>Full-Stack · Backend · DevOps · </a:t>
+            </a:r>
+            <a:r>
+              <a:rPr lang="en-US" sz="950" b="0" i="0" dirty="0" smtClean="0">
+                <a:solidFill>
+                  <a:srgbClr val="C9CAD3"/>
+                </a:solidFill>
+                <a:latin typeface="Segoe UI"/>
+              </a:rPr>
+              <a:t>Infra</a:t>
+            </a:r>
+            <a:endParaRPr sz="950" b="0" i="0" dirty="0">
+              <a:solidFill>
+                <a:srgbClr val="C9CAD3"/>
+              </a:solidFill>
+              <a:latin typeface="Segoe UI"/>
+            </a:endParaRPr>
           </a:p>
         </p:txBody>
       </p:sp>
@@ -12186,7 +12051,7 @@
         <p:spPr>
           <a:xfrm>
             <a:off x="640080" y="749808"/>
-            <a:ext cx="11155680" cy="914400"/>
+            <a:ext cx="11155680" cy="584775"/>
           </a:xfrm>
           <a:prstGeom prst="rect">
             <a:avLst/>
@@ -12208,13 +12073,76 @@
               </a:spcAft>
             </a:pPr>
             <a:r>
-              <a:rPr sz="3200" b="1" i="0">
+              <a:rPr sz="3200" b="1" i="0" dirty="0">
                 <a:solidFill>
                   <a:srgbClr val="FFFFFF"/>
                 </a:solidFill>
                 <a:latin typeface="Segoe UI"/>
               </a:rPr>
-              <a:t>From need to onboarded in 7 days.</a:t>
+              <a:t>From need to </a:t>
+            </a:r>
+            <a:r>
+              <a:rPr sz="3200" b="1" i="0" dirty="0" smtClean="0">
+                <a:solidFill>
+                  <a:srgbClr val="FFFFFF"/>
+                </a:solidFill>
+                <a:latin typeface="Segoe UI"/>
+              </a:rPr>
+              <a:t>on</a:t>
+            </a:r>
+            <a:r>
+              <a:rPr lang="en-US" sz="3200" b="1" i="0" dirty="0" smtClean="0">
+                <a:solidFill>
+                  <a:srgbClr val="FFFFFF"/>
+                </a:solidFill>
+                <a:latin typeface="Segoe UI"/>
+              </a:rPr>
+              <a:t> </a:t>
+            </a:r>
+            <a:r>
+              <a:rPr sz="3200" b="1" i="0" dirty="0" smtClean="0">
+                <a:solidFill>
+                  <a:srgbClr val="FFFFFF"/>
+                </a:solidFill>
+                <a:latin typeface="Segoe UI"/>
+              </a:rPr>
+              <a:t>boarded </a:t>
+            </a:r>
+            <a:r>
+              <a:rPr sz="3200" b="1" i="0" dirty="0">
+                <a:solidFill>
+                  <a:srgbClr val="FFFFFF"/>
+                </a:solidFill>
+                <a:latin typeface="Segoe UI"/>
+              </a:rPr>
+              <a:t>in </a:t>
+            </a:r>
+            <a:r>
+              <a:rPr lang="en-US" sz="3200" b="1" i="0" dirty="0" smtClean="0">
+                <a:solidFill>
+                  <a:srgbClr val="FFFFFF"/>
+                </a:solidFill>
+                <a:latin typeface="Segoe UI"/>
+              </a:rPr>
+              <a:t>14</a:t>
+            </a:r>
+            <a:r>
+              <a:rPr sz="3200" b="1" i="0" dirty="0" smtClean="0">
+                <a:solidFill>
+                  <a:srgbClr val="FFFFFF"/>
+                </a:solidFill>
+                <a:latin typeface="Segoe UI"/>
+              </a:rPr>
+              <a:t> </a:t>
+            </a:r>
+            <a:r>
+              <a:rPr sz="3200" b="1" i="0" dirty="0">
+                <a:solidFill>
+                  <a:srgbClr val="FFFFFF"/>
+                </a:solidFill>
+                <a:latin typeface="Segoe UI"/>
+              </a:rPr>
+              <a:t>days.</a:t>
             </a:r>
           </a:p>
         </p:txBody>
